--- a/public/fun/cards/life/life-42.pptx
+++ b/public/fun/cards/life/life-42.pptx
@@ -3085,7 +3085,7 @@
     <p:bg>
       <p:bgPr>
         <a:solidFill>
-          <a:srgbClr val="71285B"/>
+          <a:srgbClr val="0E1116"/>
         </a:solidFill>
         <a:effectLst/>
       </p:bgPr>
@@ -3105,8 +3105,8 @@
         </p:nvSpPr>
         <p:spPr>
           <a:xfrm>
-            <a:off x="360000" y="201600"/>
-            <a:ext cx="2520000" cy="100800"/>
+            <a:off x="252000" y="223200"/>
+            <a:ext cx="2016000" cy="133351"/>
           </a:xfrm>
           <a:prstGeom prst="rect">
             <a:avLst/>
@@ -3119,15 +3119,15 @@
           </a:bodyPr>
           <a:lstStyle/>
           <a:p>
-            <a:pPr algn="ctr">
+            <a:pPr algn="l">
               <a:lnSpc>
                 <a:spcPts val="1015"/>
               </a:lnSpc>
             </a:pPr>
             <a:r>
-              <a:rPr sz="700" b="1" spc="300">
+              <a:rPr sz="700" b="1" spc="200">
                 <a:solidFill>
-                  <a:srgbClr val="CDB4C6"/>
+                  <a:srgbClr val="A3A9B5"/>
                 </a:solidFill>
                 <a:latin typeface="맑은 고딕"/>
                 <a:ea typeface="맑은 고딕"/>
@@ -3137,66 +3137,16 @@
           </a:p>
         </p:txBody>
       </p:sp>
-      <p:cxnSp>
-        <p:nvCxnSpPr>
-          <p:cNvPr id="3" name="Connector 2"/>
-          <p:cNvCxnSpPr/>
-          <p:nvPr/>
-        </p:nvCxnSpPr>
-        <p:spPr>
-          <a:xfrm flipV="1">
-            <a:off x="1555200" y="478080"/>
-            <a:ext cx="95040" cy="95040"/>
-          </a:xfrm>
-          <a:prstGeom prst="line">
-            <a:avLst/>
-          </a:prstGeom>
-          <a:ln w="32400">
-            <a:solidFill>
-              <a:srgbClr val="CF77B5"/>
-            </a:solidFill>
-          </a:ln>
-        </p:spPr>
-      </p:cxnSp>
-      <p:sp>
-        <p:nvSpPr>
-          <p:cNvPr id="4" name="Oval 3"/>
-          <p:cNvSpPr/>
+      <p:sp>
+        <p:nvSpPr>
+          <p:cNvPr id="3" name="텍스트"/>
+          <p:cNvSpPr txBox="1"/>
           <p:nvPr/>
         </p:nvSpPr>
         <p:spPr>
           <a:xfrm>
-            <a:off x="1624320" y="413280"/>
-            <a:ext cx="86400" cy="86400"/>
-          </a:xfrm>
-          <a:prstGeom prst="ellipse">
-            <a:avLst/>
-          </a:prstGeom>
-          <a:solidFill>
-            <a:srgbClr val="CF77B5"/>
-          </a:solidFill>
-          <a:ln>
-            <a:noFill/>
-          </a:ln>
-        </p:spPr>
-        <p:txBody>
-          <a:bodyPr rtlCol="0" anchor="ctr"/>
-          <a:lstStyle/>
-          <a:p>
-            <a:pPr algn="ctr"/>
-          </a:p>
-        </p:txBody>
-      </p:sp>
-      <p:sp>
-        <p:nvSpPr>
-          <p:cNvPr id="5" name="텍스트"/>
-          <p:cNvSpPr txBox="1"/>
-          <p:nvPr/>
-        </p:nvSpPr>
-        <p:spPr>
-          <a:xfrm>
-            <a:off x="360000" y="684000"/>
-            <a:ext cx="2520000" cy="313692"/>
+            <a:off x="252000" y="468000"/>
+            <a:ext cx="2520000" cy="360000"/>
           </a:xfrm>
           <a:prstGeom prst="rect">
             <a:avLst/>
@@ -3209,18 +3159,18 @@
           </a:bodyPr>
           <a:lstStyle/>
           <a:p>
-            <a:pPr algn="ctr">
+            <a:pPr algn="l">
               <a:lnSpc>
-                <a:spcPts val="2755"/>
+                <a:spcPts val="3190"/>
               </a:lnSpc>
             </a:pPr>
             <a:r>
-              <a:rPr sz="1900" b="1" spc="50">
+              <a:rPr sz="2200" b="1">
                 <a:solidFill>
                   <a:srgbClr val="FFFFFF"/>
                 </a:solidFill>
-                <a:latin typeface="바탕"/>
-                <a:ea typeface="바탕"/>
+                <a:latin typeface="맑은 고딕"/>
+                <a:ea typeface="맑은 고딕"/>
               </a:rPr>
               <a:t>봉기태</a:t>
             </a:r>
@@ -3229,14 +3179,14 @@
       </p:sp>
       <p:sp>
         <p:nvSpPr>
-          <p:cNvPr id="6" name="텍스트"/>
+          <p:cNvPr id="4" name="텍스트"/>
           <p:cNvSpPr txBox="1"/>
           <p:nvPr/>
         </p:nvSpPr>
         <p:spPr>
           <a:xfrm>
-            <a:off x="360000" y="1051200"/>
-            <a:ext cx="2520000" cy="122400"/>
+            <a:off x="252000" y="871200"/>
+            <a:ext cx="2520000" cy="171451"/>
           </a:xfrm>
           <a:prstGeom prst="rect">
             <a:avLst/>
@@ -3249,15 +3199,15 @@
           </a:bodyPr>
           <a:lstStyle/>
           <a:p>
-            <a:pPr algn="ctr">
+            <a:pPr algn="l">
               <a:lnSpc>
-                <a:spcPts val="1232"/>
+                <a:spcPts val="1305"/>
               </a:lnSpc>
             </a:pPr>
             <a:r>
-              <a:rPr sz="850" b="1">
+              <a:rPr sz="900" b="0">
                 <a:solidFill>
-                  <a:srgbClr val="DDA0CB"/>
+                  <a:srgbClr val="A3A9B5"/>
                 </a:solidFill>
                 <a:latin typeface="맑은 고딕"/>
                 <a:ea typeface="맑은 고딕"/>
@@ -3269,43 +3219,14 @@
       </p:sp>
       <p:sp>
         <p:nvSpPr>
-          <p:cNvPr id="7" name="Rectangle 6"/>
-          <p:cNvSpPr/>
+          <p:cNvPr id="5" name="텍스트"/>
+          <p:cNvSpPr txBox="1"/>
           <p:nvPr/>
         </p:nvSpPr>
         <p:spPr>
           <a:xfrm>
-            <a:off x="1512000" y="1245600"/>
-            <a:ext cx="216000" cy="10800"/>
-          </a:xfrm>
-          <a:prstGeom prst="rect">
-            <a:avLst/>
-          </a:prstGeom>
-          <a:solidFill>
-            <a:srgbClr val="CF77B5"/>
-          </a:solidFill>
-          <a:ln>
-            <a:noFill/>
-          </a:ln>
-        </p:spPr>
-        <p:txBody>
-          <a:bodyPr rtlCol="0" anchor="ctr"/>
-          <a:lstStyle/>
-          <a:p>
-            <a:pPr algn="ctr"/>
-          </a:p>
-        </p:txBody>
-      </p:sp>
-      <p:sp>
-        <p:nvSpPr>
-          <p:cNvPr id="8" name="텍스트"/>
-          <p:cNvSpPr txBox="1"/>
-          <p:nvPr/>
-        </p:nvSpPr>
-        <p:spPr>
-          <a:xfrm>
-            <a:off x="360000" y="1339200"/>
-            <a:ext cx="2520000" cy="108000"/>
+            <a:off x="252000" y="1216800"/>
+            <a:ext cx="2520000" cy="129541"/>
           </a:xfrm>
           <a:prstGeom prst="rect">
             <a:avLst/>
@@ -3318,34 +3239,63 @@
           </a:bodyPr>
           <a:lstStyle/>
           <a:p>
-            <a:pPr algn="ctr">
+            <a:pPr algn="l">
               <a:lnSpc>
-                <a:spcPts val="1015"/>
+                <a:spcPts val="986"/>
               </a:lnSpc>
             </a:pPr>
             <a:r>
-              <a:rPr sz="700" b="0">
+              <a:rPr sz="680" b="0">
                 <a:solidFill>
-                  <a:srgbClr val="FFFFFF"/>
+                  <a:srgbClr val="A3A9B5"/>
                 </a:solidFill>
                 <a:latin typeface="맑은 고딕"/>
                 <a:ea typeface="맑은 고딕"/>
               </a:rPr>
-              <a:t>010-1234-5678   ·   name@example.com</a:t>
-            </a:r>
-          </a:p>
-        </p:txBody>
-      </p:sp>
-      <p:sp>
-        <p:nvSpPr>
-          <p:cNvPr id="9" name="텍스트"/>
+              <a:t>주소를 입력해 주세요</a:t>
+            </a:r>
+          </a:p>
+        </p:txBody>
+      </p:sp>
+      <p:sp>
+        <p:nvSpPr>
+          <p:cNvPr id="6" name="Rectangle 5"/>
+          <p:cNvSpPr/>
+          <p:nvPr/>
+        </p:nvSpPr>
+        <p:spPr>
+          <a:xfrm>
+            <a:off x="0" y="1476000"/>
+            <a:ext cx="3240000" cy="324000"/>
+          </a:xfrm>
+          <a:prstGeom prst="rect">
+            <a:avLst/>
+          </a:prstGeom>
+          <a:solidFill>
+            <a:srgbClr val="00C896"/>
+          </a:solidFill>
+          <a:ln>
+            <a:noFill/>
+          </a:ln>
+        </p:spPr>
+        <p:txBody>
+          <a:bodyPr rtlCol="0" anchor="ctr"/>
+          <a:lstStyle/>
+          <a:p>
+            <a:pPr algn="ctr"/>
+          </a:p>
+        </p:txBody>
+      </p:sp>
+      <p:sp>
+        <p:nvSpPr>
+          <p:cNvPr id="7" name="텍스트"/>
           <p:cNvSpPr txBox="1"/>
           <p:nvPr/>
         </p:nvSpPr>
         <p:spPr>
           <a:xfrm>
-            <a:off x="360000" y="1468800"/>
-            <a:ext cx="2520000" cy="108000"/>
+            <a:off x="252000" y="1569600"/>
+            <a:ext cx="1296000" cy="133351"/>
           </a:xfrm>
           <a:prstGeom prst="rect">
             <a:avLst/>
@@ -3358,20 +3308,60 @@
           </a:bodyPr>
           <a:lstStyle/>
           <a:p>
-            <a:pPr algn="ctr">
+            <a:pPr algn="l">
               <a:lnSpc>
                 <a:spcPts val="1015"/>
               </a:lnSpc>
             </a:pPr>
             <a:r>
-              <a:rPr sz="700" b="0">
+              <a:rPr sz="700" b="1">
                 <a:solidFill>
-                  <a:srgbClr val="CDB4C6"/>
+                  <a:srgbClr val="12151C"/>
                 </a:solidFill>
                 <a:latin typeface="맑은 고딕"/>
                 <a:ea typeface="맑은 고딕"/>
               </a:rPr>
-              <a:t>주소를 입력해 주세요</a:t>
+              <a:t>010-1234-5678</a:t>
+            </a:r>
+          </a:p>
+        </p:txBody>
+      </p:sp>
+      <p:sp>
+        <p:nvSpPr>
+          <p:cNvPr id="8" name="텍스트"/>
+          <p:cNvSpPr txBox="1"/>
+          <p:nvPr/>
+        </p:nvSpPr>
+        <p:spPr>
+          <a:xfrm>
+            <a:off x="1656000" y="1569600"/>
+            <a:ext cx="1368000" cy="133351"/>
+          </a:xfrm>
+          <a:prstGeom prst="rect">
+            <a:avLst/>
+          </a:prstGeom>
+          <a:noFill/>
+        </p:spPr>
+        <p:txBody>
+          <a:bodyPr wrap="square" lIns="0" rIns="0" tIns="0" bIns="0" anchor="t">
+            <a:spAutoFit/>
+          </a:bodyPr>
+          <a:lstStyle/>
+          <a:p>
+            <a:pPr algn="l">
+              <a:lnSpc>
+                <a:spcPts val="1015"/>
+              </a:lnSpc>
+            </a:pPr>
+            <a:r>
+              <a:rPr sz="700" b="1">
+                <a:solidFill>
+                  <a:srgbClr val="12151C"/>
+                </a:solidFill>
+                <a:latin typeface="맑은 고딕"/>
+                <a:ea typeface="맑은 고딕"/>
+              </a:rPr>
+              <a:t>name@example.com</a:t>
             </a:r>
           </a:p>
         </p:txBody>
@@ -3390,7 +3380,7 @@
     <p:bg>
       <p:bgPr>
         <a:solidFill>
-          <a:srgbClr val="FBF8F2"/>
+          <a:srgbClr val="00C896"/>
         </a:solidFill>
         <a:effectLst/>
       </p:bgPr>
@@ -3411,13 +3401,13 @@
         <p:spPr>
           <a:xfrm>
             <a:off x="0" y="0"/>
-            <a:ext cx="1224000" cy="1800000"/>
+            <a:ext cx="3240000" cy="1800000"/>
           </a:xfrm>
           <a:prstGeom prst="rect">
             <a:avLst/>
           </a:prstGeom>
           <a:solidFill>
-            <a:srgbClr val="4C913B"/>
+            <a:srgbClr val="33D3AB"/>
           </a:solidFill>
           <a:ln>
             <a:noFill/>
@@ -3431,43 +3421,109 @@
           </a:p>
         </p:txBody>
       </p:sp>
-      <p:cxnSp>
-        <p:nvCxnSpPr>
-          <p:cNvPr id="3" name="Connector 2"/>
-          <p:cNvCxnSpPr/>
-          <p:nvPr/>
-        </p:nvCxnSpPr>
-        <p:spPr>
-          <a:xfrm flipV="1">
-            <a:off x="450000" y="835200"/>
-            <a:ext cx="237600" cy="237600"/>
-          </a:xfrm>
-          <a:prstGeom prst="line">
-            <a:avLst/>
-          </a:prstGeom>
-          <a:ln w="81000">
-            <a:solidFill>
-              <a:srgbClr val="FFFFFF"/>
-            </a:solidFill>
-          </a:ln>
-        </p:spPr>
-      </p:cxnSp>
-      <p:sp>
-        <p:nvSpPr>
-          <p:cNvPr id="4" name="Oval 3"/>
+      <p:sp>
+        <p:nvSpPr>
+          <p:cNvPr id="3" name="Freeform 2"/>
           <p:cNvSpPr/>
           <p:nvPr/>
         </p:nvSpPr>
         <p:spPr>
           <a:xfrm>
-            <a:off x="622800" y="673200"/>
-            <a:ext cx="216000" cy="216000"/>
+            <a:off x="2412000" y="972000"/>
+            <a:ext cx="828000" cy="828000"/>
           </a:xfrm>
-          <a:prstGeom prst="ellipse">
+          <a:custGeom>
             <a:avLst/>
-          </a:prstGeom>
+            <a:gdLst/>
+            <a:ahLst/>
+            <a:cxnLst/>
+            <a:rect l="l" t="t" r="r" b="b"/>
+            <a:pathLst>
+              <a:path w="828000" h="828000">
+                <a:moveTo>
+                  <a:pt x="828000" y="828000"/>
+                </a:moveTo>
+                <a:lnTo>
+                  <a:pt x="0" y="828000"/>
+                </a:lnTo>
+                <a:lnTo>
+                  <a:pt x="1773" y="773846"/>
+                </a:lnTo>
+                <a:lnTo>
+                  <a:pt x="7084" y="719924"/>
+                </a:lnTo>
+                <a:lnTo>
+                  <a:pt x="15910" y="666465"/>
+                </a:lnTo>
+                <a:lnTo>
+                  <a:pt x="28213" y="613698"/>
+                </a:lnTo>
+                <a:lnTo>
+                  <a:pt x="43942" y="561848"/>
+                </a:lnTo>
+                <a:lnTo>
+                  <a:pt x="63028" y="511138"/>
+                </a:lnTo>
+                <a:lnTo>
+                  <a:pt x="85389" y="461785"/>
+                </a:lnTo>
+                <a:lnTo>
+                  <a:pt x="110931" y="414000"/>
+                </a:lnTo>
+                <a:lnTo>
+                  <a:pt x="139543" y="367988"/>
+                </a:lnTo>
+                <a:lnTo>
+                  <a:pt x="171103" y="323946"/>
+                </a:lnTo>
+                <a:lnTo>
+                  <a:pt x="205477" y="282062"/>
+                </a:lnTo>
+                <a:lnTo>
+                  <a:pt x="242516" y="242516"/>
+                </a:lnTo>
+                <a:lnTo>
+                  <a:pt x="282062" y="205477"/>
+                </a:lnTo>
+                <a:lnTo>
+                  <a:pt x="323946" y="171103"/>
+                </a:lnTo>
+                <a:lnTo>
+                  <a:pt x="367988" y="139543"/>
+                </a:lnTo>
+                <a:lnTo>
+                  <a:pt x="414000" y="110931"/>
+                </a:lnTo>
+                <a:lnTo>
+                  <a:pt x="461785" y="85389"/>
+                </a:lnTo>
+                <a:lnTo>
+                  <a:pt x="511138" y="63028"/>
+                </a:lnTo>
+                <a:lnTo>
+                  <a:pt x="561848" y="43942"/>
+                </a:lnTo>
+                <a:lnTo>
+                  <a:pt x="613698" y="28213"/>
+                </a:lnTo>
+                <a:lnTo>
+                  <a:pt x="666465" y="15910"/>
+                </a:lnTo>
+                <a:lnTo>
+                  <a:pt x="719924" y="7084"/>
+                </a:lnTo>
+                <a:lnTo>
+                  <a:pt x="773846" y="1773"/>
+                </a:lnTo>
+                <a:lnTo>
+                  <a:pt x="828000" y="0"/>
+                </a:lnTo>
+                <a:close/>
+              </a:path>
+            </a:pathLst>
+          </a:custGeom>
           <a:solidFill>
-            <a:srgbClr val="FFFFFF"/>
+            <a:srgbClr val="60DDBD"/>
           </a:solidFill>
           <a:ln>
             <a:noFill/>
@@ -3483,14 +3539,14 @@
       </p:sp>
       <p:sp>
         <p:nvSpPr>
-          <p:cNvPr id="5" name="텍스트"/>
+          <p:cNvPr id="4" name="텍스트"/>
           <p:cNvSpPr txBox="1"/>
           <p:nvPr/>
         </p:nvSpPr>
         <p:spPr>
           <a:xfrm>
-            <a:off x="1440000" y="432000"/>
-            <a:ext cx="1584000" cy="792000"/>
+            <a:off x="252000" y="432000"/>
+            <a:ext cx="2304000" cy="720000"/>
           </a:xfrm>
           <a:prstGeom prst="rect">
             <a:avLst/>
@@ -3498,85 +3554,39 @@
           <a:noFill/>
         </p:spPr>
         <p:txBody>
-          <a:bodyPr wrap="square" lIns="0" rIns="0" tIns="0" bIns="0" anchor="ctr">
+          <a:bodyPr wrap="square" lIns="0" rIns="0" tIns="0" bIns="0" anchor="t">
             <a:spAutoFit/>
           </a:bodyPr>
           <a:lstStyle/>
           <a:p>
             <a:pPr algn="l">
               <a:lnSpc>
-                <a:spcPts val="1667"/>
+                <a:spcPts val="1884"/>
               </a:lnSpc>
             </a:pPr>
             <a:r>
-              <a:rPr sz="1150" b="1">
+              <a:rPr sz="1300" b="1">
                 <a:solidFill>
-                  <a:srgbClr val="71285B"/>
+                  <a:srgbClr val="12151C"/>
                 </a:solidFill>
-                <a:latin typeface="바탕"/>
-                <a:ea typeface="바탕"/>
+                <a:latin typeface="맑은 고딕"/>
+                <a:ea typeface="맑은 고딕"/>
               </a:rPr>
-              <a:t>수고를 덜어</a:t>
-            </a:r>
-          </a:p>
-          <a:p>
-            <a:pPr algn="l">
-              <a:lnSpc>
-                <a:spcPts val="1667"/>
-              </a:lnSpc>
-            </a:pPr>
-            <a:r>
-              <a:rPr sz="1150" b="1">
-                <a:solidFill>
-                  <a:srgbClr val="71285B"/>
-                </a:solidFill>
-                <a:latin typeface="바탕"/>
-                <a:ea typeface="바탕"/>
-              </a:rPr>
-              <a:t>드리는 사람</a:t>
-            </a:r>
-          </a:p>
-        </p:txBody>
-      </p:sp>
-      <p:sp>
-        <p:nvSpPr>
-          <p:cNvPr id="6" name="Rectangle 5"/>
-          <p:cNvSpPr/>
+              <a:t>수고를 덜어 드리는 사람</a:t>
+            </a:r>
+          </a:p>
+        </p:txBody>
+      </p:sp>
+      <p:sp>
+        <p:nvSpPr>
+          <p:cNvPr id="5" name="텍스트"/>
+          <p:cNvSpPr txBox="1"/>
           <p:nvPr/>
         </p:nvSpPr>
         <p:spPr>
           <a:xfrm>
-            <a:off x="1440000" y="1317600"/>
-            <a:ext cx="180000" cy="10800"/>
-          </a:xfrm>
-          <a:prstGeom prst="rect">
-            <a:avLst/>
-          </a:prstGeom>
-          <a:solidFill>
-            <a:srgbClr val="4C913B"/>
-          </a:solidFill>
-          <a:ln>
-            <a:noFill/>
-          </a:ln>
-        </p:spPr>
-        <p:txBody>
-          <a:bodyPr rtlCol="0" anchor="ctr"/>
-          <a:lstStyle/>
-          <a:p>
-            <a:pPr algn="ctr"/>
-          </a:p>
-        </p:txBody>
-      </p:sp>
-      <p:sp>
-        <p:nvSpPr>
-          <p:cNvPr id="7" name="텍스트"/>
-          <p:cNvSpPr txBox="1"/>
-          <p:nvPr/>
-        </p:nvSpPr>
-        <p:spPr>
-          <a:xfrm>
-            <a:off x="1440000" y="1418400"/>
-            <a:ext cx="1584000" cy="108000"/>
+            <a:off x="252000" y="1476000"/>
+            <a:ext cx="1800000" cy="133351"/>
           </a:xfrm>
           <a:prstGeom prst="rect">
             <a:avLst/>
@@ -3591,13 +3601,13 @@
           <a:p>
             <a:pPr algn="l">
               <a:lnSpc>
-                <a:spcPts val="1087"/>
+                <a:spcPts val="1015"/>
               </a:lnSpc>
             </a:pPr>
             <a:r>
-              <a:rPr sz="750" b="1" spc="200">
+              <a:rPr sz="700" b="1" spc="200">
                 <a:solidFill>
-                  <a:srgbClr val="89607A"/>
+                  <a:srgbClr val="12151C"/>
                 </a:solidFill>
                 <a:latin typeface="맑은 고딕"/>
                 <a:ea typeface="맑은 고딕"/>

--- a/public/fun/cards/life/life-42.pptx
+++ b/public/fun/cards/life/life-42.pptx
@@ -3105,8 +3105,8 @@
         </p:nvSpPr>
         <p:spPr>
           <a:xfrm>
-            <a:off x="252000" y="223200"/>
-            <a:ext cx="2016000" cy="133351"/>
+            <a:off x="252000" y="252000"/>
+            <a:ext cx="1512000" cy="123826"/>
           </a:xfrm>
           <a:prstGeom prst="rect">
             <a:avLst/>
@@ -3121,11 +3121,11 @@
           <a:p>
             <a:pPr algn="l">
               <a:lnSpc>
-                <a:spcPts val="1015"/>
+                <a:spcPts val="942"/>
               </a:lnSpc>
             </a:pPr>
             <a:r>
-              <a:rPr sz="700" b="1" spc="200">
+              <a:rPr sz="650" b="1" spc="220">
                 <a:solidFill>
                   <a:srgbClr val="A3A9B5"/>
                 </a:solidFill>
@@ -3137,16 +3137,37 @@
           </a:p>
         </p:txBody>
       </p:sp>
-      <p:sp>
-        <p:nvSpPr>
-          <p:cNvPr id="3" name="텍스트"/>
+      <p:cxnSp>
+        <p:nvCxnSpPr>
+          <p:cNvPr id="3" name="Connector 2"/>
+          <p:cNvCxnSpPr/>
+          <p:nvPr/>
+        </p:nvCxnSpPr>
+        <p:spPr>
+          <a:xfrm>
+            <a:off x="252000" y="388800"/>
+            <a:ext cx="2736000" cy="0"/>
+          </a:xfrm>
+          <a:prstGeom prst="line">
+            <a:avLst/>
+          </a:prstGeom>
+          <a:ln w="3600">
+            <a:solidFill>
+              <a:srgbClr val="2A2F38"/>
+            </a:solidFill>
+          </a:ln>
+        </p:spPr>
+      </p:cxnSp>
+      <p:sp>
+        <p:nvSpPr>
+          <p:cNvPr id="4" name="텍스트"/>
           <p:cNvSpPr txBox="1"/>
           <p:nvPr/>
         </p:nvSpPr>
         <p:spPr>
           <a:xfrm>
-            <a:off x="252000" y="468000"/>
-            <a:ext cx="2520000" cy="360000"/>
+            <a:off x="252000" y="576000"/>
+            <a:ext cx="1800000" cy="237600"/>
           </a:xfrm>
           <a:prstGeom prst="rect">
             <a:avLst/>
@@ -3161,11 +3182,11 @@
           <a:p>
             <a:pPr algn="l">
               <a:lnSpc>
-                <a:spcPts val="3190"/>
+                <a:spcPts val="1957"/>
               </a:lnSpc>
             </a:pPr>
             <a:r>
-              <a:rPr sz="2200" b="1">
+              <a:rPr sz="1350" b="1" spc="120">
                 <a:solidFill>
                   <a:srgbClr val="FFFFFF"/>
                 </a:solidFill>
@@ -3179,14 +3200,14 @@
       </p:sp>
       <p:sp>
         <p:nvSpPr>
-          <p:cNvPr id="4" name="텍스트"/>
+          <p:cNvPr id="5" name="텍스트"/>
           <p:cNvSpPr txBox="1"/>
           <p:nvPr/>
         </p:nvSpPr>
         <p:spPr>
           <a:xfrm>
-            <a:off x="252000" y="871200"/>
-            <a:ext cx="2520000" cy="171451"/>
+            <a:off x="252000" y="828000"/>
+            <a:ext cx="1800000" cy="133351"/>
           </a:xfrm>
           <a:prstGeom prst="rect">
             <a:avLst/>
@@ -3201,11 +3222,11 @@
           <a:p>
             <a:pPr algn="l">
               <a:lnSpc>
-                <a:spcPts val="1305"/>
+                <a:spcPts val="1015"/>
               </a:lnSpc>
             </a:pPr>
             <a:r>
-              <a:rPr sz="900" b="0">
+              <a:rPr sz="700" b="0" spc="60">
                 <a:solidFill>
                   <a:srgbClr val="A3A9B5"/>
                 </a:solidFill>
@@ -3219,14 +3240,14 @@
       </p:sp>
       <p:sp>
         <p:nvSpPr>
-          <p:cNvPr id="5" name="텍스트"/>
+          <p:cNvPr id="6" name="텍스트"/>
           <p:cNvSpPr txBox="1"/>
           <p:nvPr/>
         </p:nvSpPr>
         <p:spPr>
           <a:xfrm>
-            <a:off x="252000" y="1216800"/>
-            <a:ext cx="2520000" cy="129541"/>
+            <a:off x="252000" y="1036800"/>
+            <a:ext cx="2520000" cy="123826"/>
           </a:xfrm>
           <a:prstGeom prst="rect">
             <a:avLst/>
@@ -3241,11 +3262,11 @@
           <a:p>
             <a:pPr algn="l">
               <a:lnSpc>
-                <a:spcPts val="986"/>
+                <a:spcPts val="942"/>
               </a:lnSpc>
             </a:pPr>
             <a:r>
-              <a:rPr sz="680" b="0">
+              <a:rPr sz="650" b="0">
                 <a:solidFill>
                   <a:srgbClr val="A3A9B5"/>
                 </a:solidFill>
@@ -3259,14 +3280,14 @@
       </p:sp>
       <p:sp>
         <p:nvSpPr>
-          <p:cNvPr id="6" name="Rectangle 5"/>
+          <p:cNvPr id="7" name="Rectangle 6"/>
           <p:cNvSpPr/>
           <p:nvPr/>
         </p:nvSpPr>
         <p:spPr>
           <a:xfrm>
-            <a:off x="0" y="1476000"/>
-            <a:ext cx="3240000" cy="324000"/>
+            <a:off x="0" y="1339200"/>
+            <a:ext cx="3240000" cy="460800"/>
           </a:xfrm>
           <a:prstGeom prst="rect">
             <a:avLst/>
@@ -3288,14 +3309,14 @@
       </p:sp>
       <p:sp>
         <p:nvSpPr>
-          <p:cNvPr id="7" name="텍스트"/>
+          <p:cNvPr id="8" name="텍스트"/>
           <p:cNvSpPr txBox="1"/>
           <p:nvPr/>
         </p:nvSpPr>
         <p:spPr>
           <a:xfrm>
-            <a:off x="252000" y="1569600"/>
-            <a:ext cx="1296000" cy="133351"/>
+            <a:off x="252000" y="1476000"/>
+            <a:ext cx="936000" cy="91441"/>
           </a:xfrm>
           <a:prstGeom prst="rect">
             <a:avLst/>
@@ -3310,11 +3331,53 @@
           <a:p>
             <a:pPr algn="l">
               <a:lnSpc>
-                <a:spcPts val="1015"/>
+                <a:spcPts val="696"/>
               </a:lnSpc>
             </a:pPr>
             <a:r>
-              <a:rPr sz="700" b="1">
+              <a:rPr sz="480" b="1" spc="140">
+                <a:solidFill>
+                  <a:srgbClr val="12151C">
+                    <a:alpha val="70000"/>
+                  </a:srgbClr>
+                </a:solidFill>
+                <a:latin typeface="맑은 고딕"/>
+                <a:ea typeface="맑은 고딕"/>
+              </a:rPr>
+              <a:t>TEL</a:t>
+            </a:r>
+          </a:p>
+        </p:txBody>
+      </p:sp>
+      <p:sp>
+        <p:nvSpPr>
+          <p:cNvPr id="9" name="텍스트"/>
+          <p:cNvSpPr txBox="1"/>
+          <p:nvPr/>
+        </p:nvSpPr>
+        <p:spPr>
+          <a:xfrm>
+            <a:off x="252000" y="1576800"/>
+            <a:ext cx="936000" cy="123826"/>
+          </a:xfrm>
+          <a:prstGeom prst="rect">
+            <a:avLst/>
+          </a:prstGeom>
+          <a:noFill/>
+        </p:spPr>
+        <p:txBody>
+          <a:bodyPr wrap="square" lIns="0" rIns="0" tIns="0" bIns="0" anchor="t">
+            <a:spAutoFit/>
+          </a:bodyPr>
+          <a:lstStyle/>
+          <a:p>
+            <a:pPr algn="l">
+              <a:lnSpc>
+                <a:spcPts val="942"/>
+              </a:lnSpc>
+            </a:pPr>
+            <a:r>
+              <a:rPr sz="650" b="1">
                 <a:solidFill>
                   <a:srgbClr val="12151C"/>
                 </a:solidFill>
@@ -3328,14 +3391,14 @@
       </p:sp>
       <p:sp>
         <p:nvSpPr>
-          <p:cNvPr id="8" name="텍스트"/>
+          <p:cNvPr id="10" name="텍스트"/>
           <p:cNvSpPr txBox="1"/>
           <p:nvPr/>
         </p:nvSpPr>
         <p:spPr>
           <a:xfrm>
-            <a:off x="1656000" y="1569600"/>
-            <a:ext cx="1368000" cy="133351"/>
+            <a:off x="1188000" y="1476000"/>
+            <a:ext cx="1080000" cy="91441"/>
           </a:xfrm>
           <a:prstGeom prst="rect">
             <a:avLst/>
@@ -3350,11 +3413,53 @@
           <a:p>
             <a:pPr algn="l">
               <a:lnSpc>
-                <a:spcPts val="1015"/>
+                <a:spcPts val="696"/>
               </a:lnSpc>
             </a:pPr>
             <a:r>
-              <a:rPr sz="700" b="1">
+              <a:rPr sz="480" b="1" spc="140">
+                <a:solidFill>
+                  <a:srgbClr val="12151C">
+                    <a:alpha val="70000"/>
+                  </a:srgbClr>
+                </a:solidFill>
+                <a:latin typeface="맑은 고딕"/>
+                <a:ea typeface="맑은 고딕"/>
+              </a:rPr>
+              <a:t>MAIL</a:t>
+            </a:r>
+          </a:p>
+        </p:txBody>
+      </p:sp>
+      <p:sp>
+        <p:nvSpPr>
+          <p:cNvPr id="11" name="텍스트"/>
+          <p:cNvSpPr txBox="1"/>
+          <p:nvPr/>
+        </p:nvSpPr>
+        <p:spPr>
+          <a:xfrm>
+            <a:off x="1188000" y="1576800"/>
+            <a:ext cx="1080000" cy="123826"/>
+          </a:xfrm>
+          <a:prstGeom prst="rect">
+            <a:avLst/>
+          </a:prstGeom>
+          <a:noFill/>
+        </p:spPr>
+        <p:txBody>
+          <a:bodyPr wrap="square" lIns="0" rIns="0" tIns="0" bIns="0" anchor="t">
+            <a:spAutoFit/>
+          </a:bodyPr>
+          <a:lstStyle/>
+          <a:p>
+            <a:pPr algn="l">
+              <a:lnSpc>
+                <a:spcPts val="942"/>
+              </a:lnSpc>
+            </a:pPr>
+            <a:r>
+              <a:rPr sz="650" b="1">
                 <a:solidFill>
                   <a:srgbClr val="12151C"/>
                 </a:solidFill>
@@ -3366,6 +3471,27 @@
           </a:p>
         </p:txBody>
       </p:sp>
+      <p:cxnSp>
+        <p:nvCxnSpPr>
+          <p:cNvPr id="12" name="Connector 11"/>
+          <p:cNvCxnSpPr/>
+          <p:nvPr/>
+        </p:nvCxnSpPr>
+        <p:spPr>
+          <a:xfrm>
+            <a:off x="1108800" y="1468800"/>
+            <a:ext cx="0" cy="208800"/>
+          </a:xfrm>
+          <a:prstGeom prst="line">
+            <a:avLst/>
+          </a:prstGeom>
+          <a:ln w="3600">
+            <a:solidFill>
+              <a:srgbClr val="12151C"/>
+            </a:solidFill>
+          </a:ln>
+        </p:spPr>
+      </p:cxnSp>
     </p:spTree>
   </p:cSld>
   <p:clrMapOvr>
@@ -3394,14 +3520,508 @@
       <p:grpSpPr/>
       <p:sp>
         <p:nvSpPr>
-          <p:cNvPr id="2" name="Rectangle 1"/>
+          <p:cNvPr id="2" name="텍스트"/>
+          <p:cNvSpPr txBox="1"/>
+          <p:nvPr/>
+        </p:nvSpPr>
+        <p:spPr>
+          <a:xfrm>
+            <a:off x="252000" y="252000"/>
+            <a:ext cx="1080000" cy="99061"/>
+          </a:xfrm>
+          <a:prstGeom prst="rect">
+            <a:avLst/>
+          </a:prstGeom>
+          <a:noFill/>
+        </p:spPr>
+        <p:txBody>
+          <a:bodyPr wrap="square" lIns="0" rIns="0" tIns="0" bIns="0" anchor="t">
+            <a:spAutoFit/>
+          </a:bodyPr>
+          <a:lstStyle/>
+          <a:p>
+            <a:pPr algn="l">
+              <a:lnSpc>
+                <a:spcPts val="754"/>
+              </a:lnSpc>
+            </a:pPr>
+            <a:r>
+              <a:rPr sz="520" b="1" spc="240">
+                <a:solidFill>
+                  <a:srgbClr val="0E3C37"/>
+                </a:solidFill>
+                <a:latin typeface="맑은 고딕"/>
+                <a:ea typeface="맑은 고딕"/>
+              </a:rPr>
+              <a:t>취급 품목</a:t>
+            </a:r>
+          </a:p>
+        </p:txBody>
+      </p:sp>
+      <p:sp>
+        <p:nvSpPr>
+          <p:cNvPr id="3" name="Rectangle 2"/>
           <p:cNvSpPr/>
           <p:nvPr/>
         </p:nvSpPr>
         <p:spPr>
           <a:xfrm>
-            <a:off x="0" y="0"/>
-            <a:ext cx="3240000" cy="1800000"/>
+            <a:off x="252000" y="352800"/>
+            <a:ext cx="108000" cy="14400"/>
+          </a:xfrm>
+          <a:prstGeom prst="rect">
+            <a:avLst/>
+          </a:prstGeom>
+          <a:solidFill>
+            <a:srgbClr val="12151C"/>
+          </a:solidFill>
+          <a:ln>
+            <a:noFill/>
+          </a:ln>
+        </p:spPr>
+        <p:txBody>
+          <a:bodyPr rtlCol="0" anchor="ctr"/>
+          <a:lstStyle/>
+          <a:p>
+            <a:pPr algn="ctr"/>
+          </a:p>
+        </p:txBody>
+      </p:sp>
+      <p:cxnSp>
+        <p:nvCxnSpPr>
+          <p:cNvPr id="4" name="Connector 3"/>
+          <p:cNvCxnSpPr/>
+          <p:nvPr/>
+        </p:nvCxnSpPr>
+        <p:spPr>
+          <a:xfrm>
+            <a:off x="252000" y="453600"/>
+            <a:ext cx="1512000" cy="0"/>
+          </a:xfrm>
+          <a:prstGeom prst="line">
+            <a:avLst/>
+          </a:prstGeom>
+          <a:ln w="3600">
+            <a:solidFill>
+              <a:srgbClr val="078065"/>
+            </a:solidFill>
+          </a:ln>
+        </p:spPr>
+      </p:cxnSp>
+      <p:sp>
+        <p:nvSpPr>
+          <p:cNvPr id="5" name="텍스트"/>
+          <p:cNvSpPr txBox="1"/>
+          <p:nvPr/>
+        </p:nvSpPr>
+        <p:spPr>
+          <a:xfrm>
+            <a:off x="252000" y="507600"/>
+            <a:ext cx="216000" cy="95251"/>
+          </a:xfrm>
+          <a:prstGeom prst="rect">
+            <a:avLst/>
+          </a:prstGeom>
+          <a:noFill/>
+        </p:spPr>
+        <p:txBody>
+          <a:bodyPr wrap="square" lIns="0" rIns="0" tIns="0" bIns="0" anchor="t">
+            <a:spAutoFit/>
+          </a:bodyPr>
+          <a:lstStyle/>
+          <a:p>
+            <a:pPr algn="l">
+              <a:lnSpc>
+                <a:spcPts val="725"/>
+              </a:lnSpc>
+            </a:pPr>
+            <a:r>
+              <a:rPr sz="500" b="1" spc="100">
+                <a:solidFill>
+                  <a:srgbClr val="0E3C37"/>
+                </a:solidFill>
+                <a:latin typeface="맑은 고딕"/>
+                <a:ea typeface="맑은 고딕"/>
+              </a:rPr>
+              <a:t>01</a:t>
+            </a:r>
+          </a:p>
+        </p:txBody>
+      </p:sp>
+      <p:sp>
+        <p:nvSpPr>
+          <p:cNvPr id="6" name="텍스트"/>
+          <p:cNvSpPr txBox="1"/>
+          <p:nvPr/>
+        </p:nvSpPr>
+        <p:spPr>
+          <a:xfrm>
+            <a:off x="489600" y="496800"/>
+            <a:ext cx="1260000" cy="133351"/>
+          </a:xfrm>
+          <a:prstGeom prst="rect">
+            <a:avLst/>
+          </a:prstGeom>
+          <a:noFill/>
+        </p:spPr>
+        <p:txBody>
+          <a:bodyPr wrap="square" lIns="0" rIns="0" tIns="0" bIns="0" anchor="t">
+            <a:spAutoFit/>
+          </a:bodyPr>
+          <a:lstStyle/>
+          <a:p>
+            <a:pPr algn="l">
+              <a:lnSpc>
+                <a:spcPts val="1015"/>
+              </a:lnSpc>
+            </a:pPr>
+            <a:r>
+              <a:rPr sz="700" b="0">
+                <a:solidFill>
+                  <a:srgbClr val="12151C"/>
+                </a:solidFill>
+                <a:latin typeface="맑은 고딕"/>
+                <a:ea typeface="맑은 고딕"/>
+              </a:rPr>
+              <a:t>생화 · 꽃다발</a:t>
+            </a:r>
+          </a:p>
+        </p:txBody>
+      </p:sp>
+      <p:cxnSp>
+        <p:nvCxnSpPr>
+          <p:cNvPr id="7" name="Connector 6"/>
+          <p:cNvCxnSpPr/>
+          <p:nvPr/>
+        </p:nvCxnSpPr>
+        <p:spPr>
+          <a:xfrm>
+            <a:off x="252000" y="640800"/>
+            <a:ext cx="1512000" cy="0"/>
+          </a:xfrm>
+          <a:prstGeom prst="line">
+            <a:avLst/>
+          </a:prstGeom>
+          <a:ln w="3600">
+            <a:solidFill>
+              <a:srgbClr val="078065"/>
+            </a:solidFill>
+          </a:ln>
+        </p:spPr>
+      </p:cxnSp>
+      <p:sp>
+        <p:nvSpPr>
+          <p:cNvPr id="8" name="텍스트"/>
+          <p:cNvSpPr txBox="1"/>
+          <p:nvPr/>
+        </p:nvSpPr>
+        <p:spPr>
+          <a:xfrm>
+            <a:off x="252000" y="694800"/>
+            <a:ext cx="216000" cy="95251"/>
+          </a:xfrm>
+          <a:prstGeom prst="rect">
+            <a:avLst/>
+          </a:prstGeom>
+          <a:noFill/>
+        </p:spPr>
+        <p:txBody>
+          <a:bodyPr wrap="square" lIns="0" rIns="0" tIns="0" bIns="0" anchor="t">
+            <a:spAutoFit/>
+          </a:bodyPr>
+          <a:lstStyle/>
+          <a:p>
+            <a:pPr algn="l">
+              <a:lnSpc>
+                <a:spcPts val="725"/>
+              </a:lnSpc>
+            </a:pPr>
+            <a:r>
+              <a:rPr sz="500" b="1" spc="100">
+                <a:solidFill>
+                  <a:srgbClr val="0E3C37"/>
+                </a:solidFill>
+                <a:latin typeface="맑은 고딕"/>
+                <a:ea typeface="맑은 고딕"/>
+              </a:rPr>
+              <a:t>02</a:t>
+            </a:r>
+          </a:p>
+        </p:txBody>
+      </p:sp>
+      <p:sp>
+        <p:nvSpPr>
+          <p:cNvPr id="9" name="텍스트"/>
+          <p:cNvSpPr txBox="1"/>
+          <p:nvPr/>
+        </p:nvSpPr>
+        <p:spPr>
+          <a:xfrm>
+            <a:off x="489600" y="684000"/>
+            <a:ext cx="1260000" cy="133351"/>
+          </a:xfrm>
+          <a:prstGeom prst="rect">
+            <a:avLst/>
+          </a:prstGeom>
+          <a:noFill/>
+        </p:spPr>
+        <p:txBody>
+          <a:bodyPr wrap="square" lIns="0" rIns="0" tIns="0" bIns="0" anchor="t">
+            <a:spAutoFit/>
+          </a:bodyPr>
+          <a:lstStyle/>
+          <a:p>
+            <a:pPr algn="l">
+              <a:lnSpc>
+                <a:spcPts val="1015"/>
+              </a:lnSpc>
+            </a:pPr>
+            <a:r>
+              <a:rPr sz="700" b="0">
+                <a:solidFill>
+                  <a:srgbClr val="12151C"/>
+                </a:solidFill>
+                <a:latin typeface="맑은 고딕"/>
+                <a:ea typeface="맑은 고딕"/>
+              </a:rPr>
+              <a:t>정기 구독</a:t>
+            </a:r>
+          </a:p>
+        </p:txBody>
+      </p:sp>
+      <p:cxnSp>
+        <p:nvCxnSpPr>
+          <p:cNvPr id="10" name="Connector 9"/>
+          <p:cNvCxnSpPr/>
+          <p:nvPr/>
+        </p:nvCxnSpPr>
+        <p:spPr>
+          <a:xfrm>
+            <a:off x="252000" y="828000"/>
+            <a:ext cx="1512000" cy="0"/>
+          </a:xfrm>
+          <a:prstGeom prst="line">
+            <a:avLst/>
+          </a:prstGeom>
+          <a:ln w="3600">
+            <a:solidFill>
+              <a:srgbClr val="078065"/>
+            </a:solidFill>
+          </a:ln>
+        </p:spPr>
+      </p:cxnSp>
+      <p:sp>
+        <p:nvSpPr>
+          <p:cNvPr id="11" name="텍스트"/>
+          <p:cNvSpPr txBox="1"/>
+          <p:nvPr/>
+        </p:nvSpPr>
+        <p:spPr>
+          <a:xfrm>
+            <a:off x="252000" y="882000"/>
+            <a:ext cx="216000" cy="95251"/>
+          </a:xfrm>
+          <a:prstGeom prst="rect">
+            <a:avLst/>
+          </a:prstGeom>
+          <a:noFill/>
+        </p:spPr>
+        <p:txBody>
+          <a:bodyPr wrap="square" lIns="0" rIns="0" tIns="0" bIns="0" anchor="t">
+            <a:spAutoFit/>
+          </a:bodyPr>
+          <a:lstStyle/>
+          <a:p>
+            <a:pPr algn="l">
+              <a:lnSpc>
+                <a:spcPts val="725"/>
+              </a:lnSpc>
+            </a:pPr>
+            <a:r>
+              <a:rPr sz="500" b="1" spc="100">
+                <a:solidFill>
+                  <a:srgbClr val="0E3C37"/>
+                </a:solidFill>
+                <a:latin typeface="맑은 고딕"/>
+                <a:ea typeface="맑은 고딕"/>
+              </a:rPr>
+              <a:t>03</a:t>
+            </a:r>
+          </a:p>
+        </p:txBody>
+      </p:sp>
+      <p:sp>
+        <p:nvSpPr>
+          <p:cNvPr id="12" name="텍스트"/>
+          <p:cNvSpPr txBox="1"/>
+          <p:nvPr/>
+        </p:nvSpPr>
+        <p:spPr>
+          <a:xfrm>
+            <a:off x="489600" y="871200"/>
+            <a:ext cx="1260000" cy="133351"/>
+          </a:xfrm>
+          <a:prstGeom prst="rect">
+            <a:avLst/>
+          </a:prstGeom>
+          <a:noFill/>
+        </p:spPr>
+        <p:txBody>
+          <a:bodyPr wrap="square" lIns="0" rIns="0" tIns="0" bIns="0" anchor="t">
+            <a:spAutoFit/>
+          </a:bodyPr>
+          <a:lstStyle/>
+          <a:p>
+            <a:pPr algn="l">
+              <a:lnSpc>
+                <a:spcPts val="1015"/>
+              </a:lnSpc>
+            </a:pPr>
+            <a:r>
+              <a:rPr sz="700" b="0">
+                <a:solidFill>
+                  <a:srgbClr val="12151C"/>
+                </a:solidFill>
+                <a:latin typeface="맑은 고딕"/>
+                <a:ea typeface="맑은 고딕"/>
+              </a:rPr>
+              <a:t>반려동물 미용</a:t>
+            </a:r>
+          </a:p>
+        </p:txBody>
+      </p:sp>
+      <p:cxnSp>
+        <p:nvCxnSpPr>
+          <p:cNvPr id="13" name="Connector 12"/>
+          <p:cNvCxnSpPr/>
+          <p:nvPr/>
+        </p:nvCxnSpPr>
+        <p:spPr>
+          <a:xfrm>
+            <a:off x="252000" y="1015200"/>
+            <a:ext cx="1512000" cy="0"/>
+          </a:xfrm>
+          <a:prstGeom prst="line">
+            <a:avLst/>
+          </a:prstGeom>
+          <a:ln w="3600">
+            <a:solidFill>
+              <a:srgbClr val="078065"/>
+            </a:solidFill>
+          </a:ln>
+        </p:spPr>
+      </p:cxnSp>
+      <p:sp>
+        <p:nvSpPr>
+          <p:cNvPr id="14" name="텍스트"/>
+          <p:cNvSpPr txBox="1"/>
+          <p:nvPr/>
+        </p:nvSpPr>
+        <p:spPr>
+          <a:xfrm>
+            <a:off x="252000" y="1069200"/>
+            <a:ext cx="216000" cy="95251"/>
+          </a:xfrm>
+          <a:prstGeom prst="rect">
+            <a:avLst/>
+          </a:prstGeom>
+          <a:noFill/>
+        </p:spPr>
+        <p:txBody>
+          <a:bodyPr wrap="square" lIns="0" rIns="0" tIns="0" bIns="0" anchor="t">
+            <a:spAutoFit/>
+          </a:bodyPr>
+          <a:lstStyle/>
+          <a:p>
+            <a:pPr algn="l">
+              <a:lnSpc>
+                <a:spcPts val="725"/>
+              </a:lnSpc>
+            </a:pPr>
+            <a:r>
+              <a:rPr sz="500" b="1" spc="100">
+                <a:solidFill>
+                  <a:srgbClr val="0E3C37"/>
+                </a:solidFill>
+                <a:latin typeface="맑은 고딕"/>
+                <a:ea typeface="맑은 고딕"/>
+              </a:rPr>
+              <a:t>04</a:t>
+            </a:r>
+          </a:p>
+        </p:txBody>
+      </p:sp>
+      <p:sp>
+        <p:nvSpPr>
+          <p:cNvPr id="15" name="텍스트"/>
+          <p:cNvSpPr txBox="1"/>
+          <p:nvPr/>
+        </p:nvSpPr>
+        <p:spPr>
+          <a:xfrm>
+            <a:off x="489600" y="1058400"/>
+            <a:ext cx="1260000" cy="133351"/>
+          </a:xfrm>
+          <a:prstGeom prst="rect">
+            <a:avLst/>
+          </a:prstGeom>
+          <a:noFill/>
+        </p:spPr>
+        <p:txBody>
+          <a:bodyPr wrap="square" lIns="0" rIns="0" tIns="0" bIns="0" anchor="t">
+            <a:spAutoFit/>
+          </a:bodyPr>
+          <a:lstStyle/>
+          <a:p>
+            <a:pPr algn="l">
+              <a:lnSpc>
+                <a:spcPts val="1015"/>
+              </a:lnSpc>
+            </a:pPr>
+            <a:r>
+              <a:rPr sz="700" b="0">
+                <a:solidFill>
+                  <a:srgbClr val="12151C"/>
+                </a:solidFill>
+                <a:latin typeface="맑은 고딕"/>
+                <a:ea typeface="맑은 고딕"/>
+              </a:rPr>
+              <a:t>이사 정리</a:t>
+            </a:r>
+          </a:p>
+        </p:txBody>
+      </p:sp>
+      <p:cxnSp>
+        <p:nvCxnSpPr>
+          <p:cNvPr id="16" name="Connector 15"/>
+          <p:cNvCxnSpPr/>
+          <p:nvPr/>
+        </p:nvCxnSpPr>
+        <p:spPr>
+          <a:xfrm>
+            <a:off x="252000" y="1202400"/>
+            <a:ext cx="1512000" cy="0"/>
+          </a:xfrm>
+          <a:prstGeom prst="line">
+            <a:avLst/>
+          </a:prstGeom>
+          <a:ln w="3600">
+            <a:solidFill>
+              <a:srgbClr val="078065"/>
+            </a:solidFill>
+          </a:ln>
+        </p:spPr>
+      </p:cxnSp>
+      <p:sp>
+        <p:nvSpPr>
+          <p:cNvPr id="17" name="Rectangle 16"/>
+          <p:cNvSpPr/>
+          <p:nvPr/>
+        </p:nvSpPr>
+        <p:spPr>
+          <a:xfrm>
+            <a:off x="2088000" y="252000"/>
+            <a:ext cx="900000" cy="1296000"/>
           </a:xfrm>
           <a:prstGeom prst="rect">
             <a:avLst/>
@@ -3423,130 +4043,14 @@
       </p:sp>
       <p:sp>
         <p:nvSpPr>
-          <p:cNvPr id="3" name="Freeform 2"/>
-          <p:cNvSpPr/>
-          <p:nvPr/>
-        </p:nvSpPr>
-        <p:spPr>
-          <a:xfrm>
-            <a:off x="2412000" y="972000"/>
-            <a:ext cx="828000" cy="828000"/>
-          </a:xfrm>
-          <a:custGeom>
-            <a:avLst/>
-            <a:gdLst/>
-            <a:ahLst/>
-            <a:cxnLst/>
-            <a:rect l="l" t="t" r="r" b="b"/>
-            <a:pathLst>
-              <a:path w="828000" h="828000">
-                <a:moveTo>
-                  <a:pt x="828000" y="828000"/>
-                </a:moveTo>
-                <a:lnTo>
-                  <a:pt x="0" y="828000"/>
-                </a:lnTo>
-                <a:lnTo>
-                  <a:pt x="1773" y="773846"/>
-                </a:lnTo>
-                <a:lnTo>
-                  <a:pt x="7084" y="719924"/>
-                </a:lnTo>
-                <a:lnTo>
-                  <a:pt x="15910" y="666465"/>
-                </a:lnTo>
-                <a:lnTo>
-                  <a:pt x="28213" y="613698"/>
-                </a:lnTo>
-                <a:lnTo>
-                  <a:pt x="43942" y="561848"/>
-                </a:lnTo>
-                <a:lnTo>
-                  <a:pt x="63028" y="511138"/>
-                </a:lnTo>
-                <a:lnTo>
-                  <a:pt x="85389" y="461785"/>
-                </a:lnTo>
-                <a:lnTo>
-                  <a:pt x="110931" y="414000"/>
-                </a:lnTo>
-                <a:lnTo>
-                  <a:pt x="139543" y="367988"/>
-                </a:lnTo>
-                <a:lnTo>
-                  <a:pt x="171103" y="323946"/>
-                </a:lnTo>
-                <a:lnTo>
-                  <a:pt x="205477" y="282062"/>
-                </a:lnTo>
-                <a:lnTo>
-                  <a:pt x="242516" y="242516"/>
-                </a:lnTo>
-                <a:lnTo>
-                  <a:pt x="282062" y="205477"/>
-                </a:lnTo>
-                <a:lnTo>
-                  <a:pt x="323946" y="171103"/>
-                </a:lnTo>
-                <a:lnTo>
-                  <a:pt x="367988" y="139543"/>
-                </a:lnTo>
-                <a:lnTo>
-                  <a:pt x="414000" y="110931"/>
-                </a:lnTo>
-                <a:lnTo>
-                  <a:pt x="461785" y="85389"/>
-                </a:lnTo>
-                <a:lnTo>
-                  <a:pt x="511138" y="63028"/>
-                </a:lnTo>
-                <a:lnTo>
-                  <a:pt x="561848" y="43942"/>
-                </a:lnTo>
-                <a:lnTo>
-                  <a:pt x="613698" y="28213"/>
-                </a:lnTo>
-                <a:lnTo>
-                  <a:pt x="666465" y="15910"/>
-                </a:lnTo>
-                <a:lnTo>
-                  <a:pt x="719924" y="7084"/>
-                </a:lnTo>
-                <a:lnTo>
-                  <a:pt x="773846" y="1773"/>
-                </a:lnTo>
-                <a:lnTo>
-                  <a:pt x="828000" y="0"/>
-                </a:lnTo>
-                <a:close/>
-              </a:path>
-            </a:pathLst>
-          </a:custGeom>
-          <a:solidFill>
-            <a:srgbClr val="60DDBD"/>
-          </a:solidFill>
-          <a:ln>
-            <a:noFill/>
-          </a:ln>
-        </p:spPr>
-        <p:txBody>
-          <a:bodyPr rtlCol="0" anchor="ctr"/>
-          <a:lstStyle/>
-          <a:p>
-            <a:pPr algn="ctr"/>
-          </a:p>
-        </p:txBody>
-      </p:sp>
-      <p:sp>
-        <p:nvSpPr>
-          <p:cNvPr id="4" name="텍스트"/>
+          <p:cNvPr id="18" name="텍스트"/>
           <p:cNvSpPr txBox="1"/>
           <p:nvPr/>
         </p:nvSpPr>
         <p:spPr>
           <a:xfrm>
-            <a:off x="252000" y="432000"/>
-            <a:ext cx="2304000" cy="720000"/>
+            <a:off x="2196000" y="360000"/>
+            <a:ext cx="684000" cy="95251"/>
           </a:xfrm>
           <a:prstGeom prst="rect">
             <a:avLst/>
@@ -3561,32 +4065,95 @@
           <a:p>
             <a:pPr algn="l">
               <a:lnSpc>
-                <a:spcPts val="1884"/>
+                <a:spcPts val="725"/>
               </a:lnSpc>
             </a:pPr>
             <a:r>
-              <a:rPr sz="1300" b="1">
+              <a:rPr sz="500" b="1" spc="240">
+                <a:solidFill>
+                  <a:srgbClr val="12151C">
+                    <a:alpha val="75000"/>
+                  </a:srgbClr>
+                </a:solidFill>
+                <a:latin typeface="맑은 고딕"/>
+                <a:ea typeface="맑은 고딕"/>
+              </a:rPr>
+              <a:t>INFO</a:t>
+            </a:r>
+          </a:p>
+        </p:txBody>
+      </p:sp>
+      <p:sp>
+        <p:nvSpPr>
+          <p:cNvPr id="19" name="텍스트"/>
+          <p:cNvSpPr txBox="1"/>
+          <p:nvPr/>
+        </p:nvSpPr>
+        <p:spPr>
+          <a:xfrm>
+            <a:off x="2196000" y="504000"/>
+            <a:ext cx="684000" cy="121921"/>
+          </a:xfrm>
+          <a:prstGeom prst="rect">
+            <a:avLst/>
+          </a:prstGeom>
+          <a:noFill/>
+        </p:spPr>
+        <p:txBody>
+          <a:bodyPr wrap="square" lIns="0" rIns="0" tIns="0" bIns="0" anchor="t">
+            <a:spAutoFit/>
+          </a:bodyPr>
+          <a:lstStyle/>
+          <a:p>
+            <a:pPr algn="l">
+              <a:lnSpc>
+                <a:spcPts val="927"/>
+              </a:lnSpc>
+            </a:pPr>
+            <a:r>
+              <a:rPr sz="640" b="1">
                 <a:solidFill>
                   <a:srgbClr val="12151C"/>
                 </a:solidFill>
                 <a:latin typeface="맑은 고딕"/>
                 <a:ea typeface="맑은 고딕"/>
               </a:rPr>
-              <a:t>수고를 덜어 드리는 사람</a:t>
-            </a:r>
-          </a:p>
-        </p:txBody>
-      </p:sp>
-      <p:sp>
-        <p:nvSpPr>
-          <p:cNvPr id="5" name="텍스트"/>
+              <a:t>매일 10:00 – 20:00</a:t>
+            </a:r>
+          </a:p>
+        </p:txBody>
+      </p:sp>
+      <p:cxnSp>
+        <p:nvCxnSpPr>
+          <p:cNvPr id="20" name="Connector 19"/>
+          <p:cNvCxnSpPr/>
+          <p:nvPr/>
+        </p:nvCxnSpPr>
+        <p:spPr>
+          <a:xfrm>
+            <a:off x="2196000" y="770400"/>
+            <a:ext cx="684000" cy="0"/>
+          </a:xfrm>
+          <a:prstGeom prst="line">
+            <a:avLst/>
+          </a:prstGeom>
+          <a:ln w="3600">
+            <a:solidFill>
+              <a:srgbClr val="12151C"/>
+            </a:solidFill>
+          </a:ln>
+        </p:spPr>
+      </p:cxnSp>
+      <p:sp>
+        <p:nvSpPr>
+          <p:cNvPr id="21" name="텍스트"/>
           <p:cNvSpPr txBox="1"/>
           <p:nvPr/>
         </p:nvSpPr>
         <p:spPr>
           <a:xfrm>
-            <a:off x="252000" y="1476000"/>
-            <a:ext cx="1800000" cy="133351"/>
+            <a:off x="2196000" y="849600"/>
+            <a:ext cx="684000" cy="91441"/>
           </a:xfrm>
           <a:prstGeom prst="rect">
             <a:avLst/>
@@ -3601,11 +4168,93 @@
           <a:p>
             <a:pPr algn="l">
               <a:lnSpc>
-                <a:spcPts val="1015"/>
+                <a:spcPts val="696"/>
               </a:lnSpc>
             </a:pPr>
             <a:r>
-              <a:rPr sz="700" b="1" spc="200">
+              <a:rPr sz="480" b="1" spc="140">
+                <a:solidFill>
+                  <a:srgbClr val="12151C">
+                    <a:alpha val="75000"/>
+                  </a:srgbClr>
+                </a:solidFill>
+                <a:latin typeface="맑은 고딕"/>
+                <a:ea typeface="맑은 고딕"/>
+              </a:rPr>
+              <a:t>KAKAO</a:t>
+            </a:r>
+          </a:p>
+        </p:txBody>
+      </p:sp>
+      <p:sp>
+        <p:nvSpPr>
+          <p:cNvPr id="22" name="텍스트"/>
+          <p:cNvSpPr txBox="1"/>
+          <p:nvPr/>
+        </p:nvSpPr>
+        <p:spPr>
+          <a:xfrm>
+            <a:off x="2196000" y="957600"/>
+            <a:ext cx="684000" cy="121921"/>
+          </a:xfrm>
+          <a:prstGeom prst="rect">
+            <a:avLst/>
+          </a:prstGeom>
+          <a:noFill/>
+        </p:spPr>
+        <p:txBody>
+          <a:bodyPr wrap="square" lIns="0" rIns="0" tIns="0" bIns="0" anchor="t">
+            <a:spAutoFit/>
+          </a:bodyPr>
+          <a:lstStyle/>
+          <a:p>
+            <a:pPr algn="l">
+              <a:lnSpc>
+                <a:spcPts val="927"/>
+              </a:lnSpc>
+            </a:pPr>
+            <a:r>
+              <a:rPr sz="640" b="1">
+                <a:solidFill>
+                  <a:srgbClr val="12151C"/>
+                </a:solidFill>
+                <a:latin typeface="맑은 고딕"/>
+                <a:ea typeface="맑은 고딕"/>
+              </a:rPr>
+              <a:t>@채널아이디</a:t>
+            </a:r>
+          </a:p>
+        </p:txBody>
+      </p:sp>
+      <p:sp>
+        <p:nvSpPr>
+          <p:cNvPr id="23" name="텍스트"/>
+          <p:cNvSpPr txBox="1"/>
+          <p:nvPr/>
+        </p:nvSpPr>
+        <p:spPr>
+          <a:xfrm>
+            <a:off x="2196000" y="1368000"/>
+            <a:ext cx="720000" cy="106681"/>
+          </a:xfrm>
+          <a:prstGeom prst="rect">
+            <a:avLst/>
+          </a:prstGeom>
+          <a:noFill/>
+        </p:spPr>
+        <p:txBody>
+          <a:bodyPr wrap="square" lIns="0" rIns="0" tIns="0" bIns="0" anchor="t">
+            <a:spAutoFit/>
+          </a:bodyPr>
+          <a:lstStyle/>
+          <a:p>
+            <a:pPr algn="l">
+              <a:lnSpc>
+                <a:spcPts val="811"/>
+              </a:lnSpc>
+            </a:pPr>
+            <a:r>
+              <a:rPr sz="560" b="1" spc="80">
                 <a:solidFill>
                   <a:srgbClr val="12151C"/>
                 </a:solidFill>
